--- a/Material csv(26.07.28)/논문 자료.pptx
+++ b/Material csv(26.07.28)/논문 자료.pptx
@@ -5,7 +5,7 @@
     <p:sldMasterId id="2147483648" r:id="rId1"/>
   </p:sldMasterIdLst>
   <p:notesMasterIdLst>
-    <p:notesMasterId r:id="rId23"/>
+    <p:notesMasterId r:id="rId24"/>
   </p:notesMasterIdLst>
   <p:sldIdLst>
     <p:sldId id="256" r:id="rId2"/>
@@ -29,6 +29,7 @@
     <p:sldId id="1594" r:id="rId20"/>
     <p:sldId id="1595" r:id="rId21"/>
     <p:sldId id="1597" r:id="rId22"/>
+    <p:sldId id="1598" r:id="rId23"/>
   </p:sldIdLst>
   <p:sldSz cx="12192000" cy="6858000"/>
   <p:notesSz cx="6858000" cy="9144000"/>
@@ -127,6 +128,11 @@
       </a:defRPr>
     </a:lvl9pPr>
   </p:defaultTextStyle>
+  <p:extLst>
+    <p:ext uri="{EFAFB233-063F-42B5-8137-9DF3F51BA10A}">
+      <p15:sldGuideLst xmlns:p15="http://schemas.microsoft.com/office/powerpoint/2012/main"/>
+    </p:ext>
+  </p:extLst>
 </p:presentation>
 </file>
 
@@ -212,7 +218,7 @@
           <a:p>
             <a:fld id="{CCADD0A9-ECE3-4046-AAEC-24AACBBB2F3E}" type="datetimeFigureOut">
               <a:rPr lang="ko-KR" altLang="en-US" smtClean="0"/>
-              <a:t>2026-08-24</a:t>
+              <a:t>2026-08-26</a:t>
             </a:fld>
             <a:endParaRPr lang="ko-KR" altLang="en-US"/>
           </a:p>
@@ -962,7 +968,7 @@
           <a:p>
             <a:fld id="{B1AFF881-97E8-4F41-BDDF-BD69BA0EFE12}" type="datetimeFigureOut">
               <a:rPr lang="ko-KR" altLang="en-US" smtClean="0"/>
-              <a:t>2026-08-24</a:t>
+              <a:t>2026-08-26</a:t>
             </a:fld>
             <a:endParaRPr lang="ko-KR" altLang="en-US"/>
           </a:p>
@@ -1160,7 +1166,7 @@
           <a:p>
             <a:fld id="{B1AFF881-97E8-4F41-BDDF-BD69BA0EFE12}" type="datetimeFigureOut">
               <a:rPr lang="ko-KR" altLang="en-US" smtClean="0"/>
-              <a:t>2026-08-24</a:t>
+              <a:t>2026-08-26</a:t>
             </a:fld>
             <a:endParaRPr lang="ko-KR" altLang="en-US"/>
           </a:p>
@@ -1368,7 +1374,7 @@
           <a:p>
             <a:fld id="{B1AFF881-97E8-4F41-BDDF-BD69BA0EFE12}" type="datetimeFigureOut">
               <a:rPr lang="ko-KR" altLang="en-US" smtClean="0"/>
-              <a:t>2026-08-24</a:t>
+              <a:t>2026-08-26</a:t>
             </a:fld>
             <a:endParaRPr lang="ko-KR" altLang="en-US"/>
           </a:p>
@@ -1566,7 +1572,7 @@
           <a:p>
             <a:fld id="{B1AFF881-97E8-4F41-BDDF-BD69BA0EFE12}" type="datetimeFigureOut">
               <a:rPr lang="ko-KR" altLang="en-US" smtClean="0"/>
-              <a:t>2026-08-24</a:t>
+              <a:t>2026-08-26</a:t>
             </a:fld>
             <a:endParaRPr lang="ko-KR" altLang="en-US"/>
           </a:p>
@@ -1841,7 +1847,7 @@
           <a:p>
             <a:fld id="{B1AFF881-97E8-4F41-BDDF-BD69BA0EFE12}" type="datetimeFigureOut">
               <a:rPr lang="ko-KR" altLang="en-US" smtClean="0"/>
-              <a:t>2026-08-24</a:t>
+              <a:t>2026-08-26</a:t>
             </a:fld>
             <a:endParaRPr lang="ko-KR" altLang="en-US"/>
           </a:p>
@@ -2106,7 +2112,7 @@
           <a:p>
             <a:fld id="{B1AFF881-97E8-4F41-BDDF-BD69BA0EFE12}" type="datetimeFigureOut">
               <a:rPr lang="ko-KR" altLang="en-US" smtClean="0"/>
-              <a:t>2026-08-24</a:t>
+              <a:t>2026-08-26</a:t>
             </a:fld>
             <a:endParaRPr lang="ko-KR" altLang="en-US"/>
           </a:p>
@@ -2518,7 +2524,7 @@
           <a:p>
             <a:fld id="{B1AFF881-97E8-4F41-BDDF-BD69BA0EFE12}" type="datetimeFigureOut">
               <a:rPr lang="ko-KR" altLang="en-US" smtClean="0"/>
-              <a:t>2026-08-24</a:t>
+              <a:t>2026-08-26</a:t>
             </a:fld>
             <a:endParaRPr lang="ko-KR" altLang="en-US"/>
           </a:p>
@@ -2659,7 +2665,7 @@
           <a:p>
             <a:fld id="{B1AFF881-97E8-4F41-BDDF-BD69BA0EFE12}" type="datetimeFigureOut">
               <a:rPr lang="ko-KR" altLang="en-US" smtClean="0"/>
-              <a:t>2026-08-24</a:t>
+              <a:t>2026-08-26</a:t>
             </a:fld>
             <a:endParaRPr lang="ko-KR" altLang="en-US"/>
           </a:p>
@@ -2772,7 +2778,7 @@
           <a:p>
             <a:fld id="{B1AFF881-97E8-4F41-BDDF-BD69BA0EFE12}" type="datetimeFigureOut">
               <a:rPr lang="ko-KR" altLang="en-US" smtClean="0"/>
-              <a:t>2026-08-24</a:t>
+              <a:t>2026-08-26</a:t>
             </a:fld>
             <a:endParaRPr lang="ko-KR" altLang="en-US"/>
           </a:p>
@@ -3083,7 +3089,7 @@
           <a:p>
             <a:fld id="{B1AFF881-97E8-4F41-BDDF-BD69BA0EFE12}" type="datetimeFigureOut">
               <a:rPr lang="ko-KR" altLang="en-US" smtClean="0"/>
-              <a:t>2026-08-24</a:t>
+              <a:t>2026-08-26</a:t>
             </a:fld>
             <a:endParaRPr lang="ko-KR" altLang="en-US"/>
           </a:p>
@@ -3371,7 +3377,7 @@
           <a:p>
             <a:fld id="{B1AFF881-97E8-4F41-BDDF-BD69BA0EFE12}" type="datetimeFigureOut">
               <a:rPr lang="ko-KR" altLang="en-US" smtClean="0"/>
-              <a:t>2026-08-24</a:t>
+              <a:t>2026-08-26</a:t>
             </a:fld>
             <a:endParaRPr lang="ko-KR" altLang="en-US"/>
           </a:p>
@@ -3612,7 +3618,7 @@
           <a:p>
             <a:fld id="{B1AFF881-97E8-4F41-BDDF-BD69BA0EFE12}" type="datetimeFigureOut">
               <a:rPr lang="ko-KR" altLang="en-US" smtClean="0"/>
-              <a:t>2026-08-24</a:t>
+              <a:t>2026-08-26</a:t>
             </a:fld>
             <a:endParaRPr lang="ko-KR" altLang="en-US"/>
           </a:p>
@@ -10072,36 +10078,6 @@
           </a:ln>
         </p:spPr>
       </p:pic>
-      <p:pic>
-        <p:nvPicPr>
-          <p:cNvPr id="6" name="그림 5">
-            <a:extLst>
-              <a:ext uri="{FF2B5EF4-FFF2-40B4-BE49-F238E27FC236}">
-                <a16:creationId xmlns:a16="http://schemas.microsoft.com/office/drawing/2014/main" id="{23BEFA6D-E55C-82B1-8872-E9CBFD4A20F0}"/>
-              </a:ext>
-            </a:extLst>
-          </p:cNvPr>
-          <p:cNvPicPr>
-            <a:picLocks noChangeAspect="1"/>
-          </p:cNvPicPr>
-          <p:nvPr/>
-        </p:nvPicPr>
-        <p:blipFill>
-          <a:blip r:embed="rId3"/>
-          <a:stretch>
-            <a:fillRect/>
-          </a:stretch>
-        </p:blipFill>
-        <p:spPr>
-          <a:xfrm rot="5400000">
-            <a:off x="3563881" y="4342298"/>
-            <a:ext cx="5064241" cy="10619403"/>
-          </a:xfrm>
-          <a:prstGeom prst="rect">
-            <a:avLst/>
-          </a:prstGeom>
-        </p:spPr>
-      </p:pic>
       <p:sp>
         <p:nvSpPr>
           <p:cNvPr id="8" name="직사각형 7">
@@ -11521,7 +11497,7 @@
           <p:nvPr/>
         </p:nvPicPr>
         <p:blipFill>
-          <a:blip r:embed="rId4">
+          <a:blip r:embed="rId3">
             <a:extLst>
               <a:ext uri="{28A0092B-C50C-407E-A947-70E740481C1C}">
                 <a14:useLocalDpi xmlns:a14="http://schemas.microsoft.com/office/drawing/2010/main" val="0"/>
@@ -11558,7 +11534,7 @@
           <p:nvPr/>
         </p:nvPicPr>
         <p:blipFill>
-          <a:blip r:embed="rId4">
+          <a:blip r:embed="rId3">
             <a:extLst>
               <a:ext uri="{28A0092B-C50C-407E-A947-70E740481C1C}">
                 <a14:useLocalDpi xmlns:a14="http://schemas.microsoft.com/office/drawing/2010/main" val="0"/>
@@ -11918,6 +11894,1275 @@
     <p:extLst>
       <p:ext uri="{BB962C8B-B14F-4D97-AF65-F5344CB8AC3E}">
         <p14:creationId xmlns:p14="http://schemas.microsoft.com/office/powerpoint/2010/main" val="1383168438"/>
+      </p:ext>
+    </p:extLst>
+  </p:cSld>
+  <p:clrMapOvr>
+    <a:masterClrMapping/>
+  </p:clrMapOvr>
+</p:sld>
+</file>
+
+<file path=ppt/slides/slide22.xml><?xml version="1.0" encoding="utf-8"?>
+<p:sld xmlns:a="http://schemas.openxmlformats.org/drawingml/2006/main" xmlns:r="http://schemas.openxmlformats.org/officeDocument/2006/relationships" xmlns:p="http://schemas.openxmlformats.org/presentationml/2006/main">
+  <p:cSld>
+    <p:spTree>
+      <p:nvGrpSpPr>
+        <p:cNvPr id="1" name=""/>
+        <p:cNvGrpSpPr/>
+        <p:nvPr/>
+      </p:nvGrpSpPr>
+      <p:grpSpPr>
+        <a:xfrm>
+          <a:off x="0" y="0"/>
+          <a:ext cx="0" cy="0"/>
+          <a:chOff x="0" y="0"/>
+          <a:chExt cx="0" cy="0"/>
+        </a:xfrm>
+      </p:grpSpPr>
+      <p:sp>
+        <p:nvSpPr>
+          <p:cNvPr id="6" name="직사각형 5">
+            <a:extLst>
+              <a:ext uri="{FF2B5EF4-FFF2-40B4-BE49-F238E27FC236}">
+                <a16:creationId xmlns:a16="http://schemas.microsoft.com/office/drawing/2014/main" id="{D10FC5A8-349F-7F14-4E15-D786D98F0BBC}"/>
+              </a:ext>
+            </a:extLst>
+          </p:cNvPr>
+          <p:cNvSpPr/>
+          <p:nvPr/>
+        </p:nvSpPr>
+        <p:spPr>
+          <a:xfrm>
+            <a:off x="108488" y="356460"/>
+            <a:ext cx="11887200" cy="1053886"/>
+          </a:xfrm>
+          <a:prstGeom prst="rect">
+            <a:avLst/>
+          </a:prstGeom>
+          <a:solidFill>
+            <a:schemeClr val="accent1">
+              <a:lumMod val="20000"/>
+              <a:lumOff val="80000"/>
+            </a:schemeClr>
+          </a:solidFill>
+        </p:spPr>
+        <p:style>
+          <a:lnRef idx="2">
+            <a:schemeClr val="accent4">
+              <a:shade val="15000"/>
+            </a:schemeClr>
+          </a:lnRef>
+          <a:fillRef idx="1">
+            <a:schemeClr val="accent4"/>
+          </a:fillRef>
+          <a:effectRef idx="0">
+            <a:schemeClr val="accent4"/>
+          </a:effectRef>
+          <a:fontRef idx="minor">
+            <a:schemeClr val="lt1"/>
+          </a:fontRef>
+        </p:style>
+        <p:txBody>
+          <a:bodyPr rtlCol="0" anchor="ctr"/>
+          <a:lstStyle/>
+          <a:p>
+            <a:pPr algn="ctr"/>
+            <a:r>
+              <a:rPr lang="en-US" altLang="ko-KR" dirty="0">
+                <a:solidFill>
+                  <a:schemeClr val="tx1"/>
+                </a:solidFill>
+                <a:latin typeface="바탕체" panose="02030609000101010101" pitchFamily="17" charset="-127"/>
+                <a:ea typeface="바탕체" panose="02030609000101010101" pitchFamily="17" charset="-127"/>
+              </a:rPr>
+              <a:t>Phase Inverse </a:t>
+            </a:r>
+            <a:r>
+              <a:rPr lang="ko-KR" altLang="en-US" dirty="0" err="1">
+                <a:solidFill>
+                  <a:schemeClr val="tx1"/>
+                </a:solidFill>
+                <a:latin typeface="바탕체" panose="02030609000101010101" pitchFamily="17" charset="-127"/>
+                <a:ea typeface="바탕체" panose="02030609000101010101" pitchFamily="17" charset="-127"/>
+              </a:rPr>
+              <a:t>과검</a:t>
+            </a:r>
+            <a:r>
+              <a:rPr lang="ko-KR" altLang="en-US" dirty="0">
+                <a:solidFill>
+                  <a:schemeClr val="tx1"/>
+                </a:solidFill>
+                <a:latin typeface="바탕체" panose="02030609000101010101" pitchFamily="17" charset="-127"/>
+                <a:ea typeface="바탕체" panose="02030609000101010101" pitchFamily="17" charset="-127"/>
+              </a:rPr>
+              <a:t> 제어 </a:t>
+            </a:r>
+            <a:r>
+              <a:rPr lang="en-US" altLang="ko-KR" dirty="0">
+                <a:solidFill>
+                  <a:schemeClr val="tx1"/>
+                </a:solidFill>
+                <a:latin typeface="바탕체" panose="02030609000101010101" pitchFamily="17" charset="-127"/>
+                <a:ea typeface="바탕체" panose="02030609000101010101" pitchFamily="17" charset="-127"/>
+              </a:rPr>
+              <a:t>: </a:t>
+            </a:r>
+            <a:r>
+              <a:rPr lang="ko-KR" altLang="en-US" dirty="0">
+                <a:solidFill>
+                  <a:schemeClr val="tx1"/>
+                </a:solidFill>
+                <a:latin typeface="바탕체" panose="02030609000101010101" pitchFamily="17" charset="-127"/>
+                <a:ea typeface="바탕체" panose="02030609000101010101" pitchFamily="17" charset="-127"/>
+              </a:rPr>
+              <a:t>복합 필터링 </a:t>
+            </a:r>
+            <a:r>
+              <a:rPr lang="ko-KR" altLang="en-US" dirty="0" err="1">
+                <a:solidFill>
+                  <a:schemeClr val="tx1"/>
+                </a:solidFill>
+                <a:latin typeface="바탕체" panose="02030609000101010101" pitchFamily="17" charset="-127"/>
+                <a:ea typeface="바탕체" panose="02030609000101010101" pitchFamily="17" charset="-127"/>
+              </a:rPr>
+              <a:t>매커니즘</a:t>
+            </a:r>
+            <a:endParaRPr lang="ko-KR" altLang="en-US" dirty="0">
+              <a:solidFill>
+                <a:schemeClr val="tx1"/>
+              </a:solidFill>
+              <a:latin typeface="바탕체" panose="02030609000101010101" pitchFamily="17" charset="-127"/>
+              <a:ea typeface="바탕체" panose="02030609000101010101" pitchFamily="17" charset="-127"/>
+            </a:endParaRPr>
+          </a:p>
+        </p:txBody>
+      </p:sp>
+      <p:sp>
+        <p:nvSpPr>
+          <p:cNvPr id="8" name="직사각형 7">
+            <a:extLst>
+              <a:ext uri="{FF2B5EF4-FFF2-40B4-BE49-F238E27FC236}">
+                <a16:creationId xmlns:a16="http://schemas.microsoft.com/office/drawing/2014/main" id="{BC663435-24C2-6B32-9C3B-E81D7F0176C8}"/>
+              </a:ext>
+            </a:extLst>
+          </p:cNvPr>
+          <p:cNvSpPr/>
+          <p:nvPr/>
+        </p:nvSpPr>
+        <p:spPr>
+          <a:xfrm>
+            <a:off x="108488" y="1704812"/>
+            <a:ext cx="11887200" cy="4937671"/>
+          </a:xfrm>
+          <a:prstGeom prst="rect">
+            <a:avLst/>
+          </a:prstGeom>
+          <a:solidFill>
+            <a:schemeClr val="bg1">
+              <a:lumMod val="95000"/>
+            </a:schemeClr>
+          </a:solidFill>
+          <a:ln>
+            <a:noFill/>
+          </a:ln>
+        </p:spPr>
+        <p:style>
+          <a:lnRef idx="2">
+            <a:schemeClr val="accent4">
+              <a:shade val="15000"/>
+            </a:schemeClr>
+          </a:lnRef>
+          <a:fillRef idx="1">
+            <a:schemeClr val="accent4"/>
+          </a:fillRef>
+          <a:effectRef idx="0">
+            <a:schemeClr val="accent4"/>
+          </a:effectRef>
+          <a:fontRef idx="minor">
+            <a:schemeClr val="lt1"/>
+          </a:fontRef>
+        </p:style>
+        <p:txBody>
+          <a:bodyPr rtlCol="0" anchor="ctr"/>
+          <a:lstStyle/>
+          <a:p>
+            <a:pPr algn="ctr"/>
+            <a:endParaRPr lang="ko-KR" altLang="en-US" dirty="0">
+              <a:solidFill>
+                <a:schemeClr val="tx1"/>
+              </a:solidFill>
+              <a:latin typeface="바탕체" panose="02030609000101010101" pitchFamily="17" charset="-127"/>
+              <a:ea typeface="바탕체" panose="02030609000101010101" pitchFamily="17" charset="-127"/>
+            </a:endParaRPr>
+          </a:p>
+        </p:txBody>
+      </p:sp>
+      <p:sp>
+        <p:nvSpPr>
+          <p:cNvPr id="9" name="직사각형 8">
+            <a:extLst>
+              <a:ext uri="{FF2B5EF4-FFF2-40B4-BE49-F238E27FC236}">
+                <a16:creationId xmlns:a16="http://schemas.microsoft.com/office/drawing/2014/main" id="{48E8F3A4-AF6B-F7E4-7B93-8DB2A8B1166E}"/>
+              </a:ext>
+            </a:extLst>
+          </p:cNvPr>
+          <p:cNvSpPr/>
+          <p:nvPr/>
+        </p:nvSpPr>
+        <p:spPr>
+          <a:xfrm>
+            <a:off x="457198" y="1921788"/>
+            <a:ext cx="6261315" cy="604435"/>
+          </a:xfrm>
+          <a:prstGeom prst="rect">
+            <a:avLst/>
+          </a:prstGeom>
+          <a:solidFill>
+            <a:schemeClr val="accent2">
+              <a:lumMod val="40000"/>
+              <a:lumOff val="60000"/>
+            </a:schemeClr>
+          </a:solidFill>
+          <a:ln>
+            <a:noFill/>
+          </a:ln>
+        </p:spPr>
+        <p:style>
+          <a:lnRef idx="2">
+            <a:schemeClr val="accent1">
+              <a:shade val="15000"/>
+            </a:schemeClr>
+          </a:lnRef>
+          <a:fillRef idx="1">
+            <a:schemeClr val="accent1"/>
+          </a:fillRef>
+          <a:effectRef idx="0">
+            <a:schemeClr val="accent1"/>
+          </a:effectRef>
+          <a:fontRef idx="minor">
+            <a:schemeClr val="lt1"/>
+          </a:fontRef>
+        </p:style>
+        <p:txBody>
+          <a:bodyPr rtlCol="0" anchor="ctr"/>
+          <a:lstStyle/>
+          <a:p>
+            <a:r>
+              <a:rPr lang="ko-KR" altLang="ko-KR" dirty="0">
+                <a:solidFill>
+                  <a:schemeClr val="tx1"/>
+                </a:solidFill>
+                <a:latin typeface="바탕체" panose="02030609000101010101" pitchFamily="17" charset="-127"/>
+                <a:ea typeface="바탕체" panose="02030609000101010101" pitchFamily="17" charset="-127"/>
+              </a:rPr>
+              <a:t>[원시 </a:t>
+            </a:r>
+            <a:r>
+              <a:rPr lang="ko-KR" altLang="ko-KR" dirty="0" err="1">
+                <a:solidFill>
+                  <a:schemeClr val="tx1"/>
+                </a:solidFill>
+                <a:latin typeface="바탕체" panose="02030609000101010101" pitchFamily="17" charset="-127"/>
+                <a:ea typeface="바탕체" panose="02030609000101010101" pitchFamily="17" charset="-127"/>
+              </a:rPr>
+              <a:t>A-Scan</a:t>
+            </a:r>
+            <a:r>
+              <a:rPr lang="ko-KR" altLang="ko-KR" dirty="0">
+                <a:solidFill>
+                  <a:schemeClr val="tx1"/>
+                </a:solidFill>
+                <a:latin typeface="바탕체" panose="02030609000101010101" pitchFamily="17" charset="-127"/>
+                <a:ea typeface="바탕체" panose="02030609000101010101" pitchFamily="17" charset="-127"/>
+              </a:rPr>
+              <a:t> 신호] </a:t>
+            </a:r>
+            <a:r>
+              <a:rPr lang="ko-KR" altLang="en-US" dirty="0" err="1">
+                <a:solidFill>
+                  <a:schemeClr val="tx1"/>
+                </a:solidFill>
+                <a:latin typeface="바탕체" panose="02030609000101010101" pitchFamily="17" charset="-127"/>
+                <a:ea typeface="바탕체" panose="02030609000101010101" pitchFamily="17" charset="-127"/>
+              </a:rPr>
+              <a:t>를</a:t>
+            </a:r>
+            <a:r>
+              <a:rPr lang="en-US" altLang="ko-KR" dirty="0">
+                <a:solidFill>
+                  <a:schemeClr val="tx1"/>
+                </a:solidFill>
+                <a:latin typeface="바탕체" panose="02030609000101010101" pitchFamily="17" charset="-127"/>
+                <a:ea typeface="바탕체" panose="02030609000101010101" pitchFamily="17" charset="-127"/>
+              </a:rPr>
+              <a:t> </a:t>
+            </a:r>
+            <a:r>
+              <a:rPr lang="ko-KR" altLang="en-US" dirty="0">
+                <a:solidFill>
+                  <a:schemeClr val="tx1"/>
+                </a:solidFill>
+                <a:latin typeface="바탕체" panose="02030609000101010101" pitchFamily="17" charset="-127"/>
+                <a:ea typeface="바탕체" panose="02030609000101010101" pitchFamily="17" charset="-127"/>
+              </a:rPr>
+              <a:t>상관계수 연산</a:t>
+            </a:r>
+          </a:p>
+        </p:txBody>
+      </p:sp>
+      <p:sp>
+        <p:nvSpPr>
+          <p:cNvPr id="17" name="직사각형 16">
+            <a:extLst>
+              <a:ext uri="{FF2B5EF4-FFF2-40B4-BE49-F238E27FC236}">
+                <a16:creationId xmlns:a16="http://schemas.microsoft.com/office/drawing/2014/main" id="{CC288EFB-AF18-D85C-814C-7BF7FFE91A53}"/>
+              </a:ext>
+            </a:extLst>
+          </p:cNvPr>
+          <p:cNvSpPr/>
+          <p:nvPr/>
+        </p:nvSpPr>
+        <p:spPr>
+          <a:xfrm>
+            <a:off x="457198" y="2916263"/>
+            <a:ext cx="11244022" cy="604435"/>
+          </a:xfrm>
+          <a:prstGeom prst="rect">
+            <a:avLst/>
+          </a:prstGeom>
+          <a:solidFill>
+            <a:schemeClr val="accent2">
+              <a:lumMod val="40000"/>
+              <a:lumOff val="60000"/>
+            </a:schemeClr>
+          </a:solidFill>
+          <a:ln>
+            <a:noFill/>
+          </a:ln>
+        </p:spPr>
+        <p:style>
+          <a:lnRef idx="2">
+            <a:schemeClr val="accent1">
+              <a:shade val="15000"/>
+            </a:schemeClr>
+          </a:lnRef>
+          <a:fillRef idx="1">
+            <a:schemeClr val="accent1"/>
+          </a:fillRef>
+          <a:effectRef idx="0">
+            <a:schemeClr val="accent1"/>
+          </a:effectRef>
+          <a:fontRef idx="minor">
+            <a:schemeClr val="lt1"/>
+          </a:fontRef>
+        </p:style>
+        <p:txBody>
+          <a:bodyPr rtlCol="0" anchor="ctr"/>
+          <a:lstStyle/>
+          <a:p>
+            <a:r>
+              <a:rPr lang="ko-KR" altLang="ko-KR" dirty="0">
+                <a:solidFill>
+                  <a:schemeClr val="tx1"/>
+                </a:solidFill>
+                <a:latin typeface="바탕체" panose="02030609000101010101" pitchFamily="17" charset="-127"/>
+                <a:ea typeface="바탕체" panose="02030609000101010101" pitchFamily="17" charset="-127"/>
+              </a:rPr>
+              <a:t>[1단계] 상관계수 </a:t>
+            </a:r>
+            <a:r>
+              <a:rPr lang="ko-KR" altLang="ko-KR" dirty="0" err="1">
+                <a:solidFill>
+                  <a:schemeClr val="tx1"/>
+                </a:solidFill>
+                <a:latin typeface="바탕체" panose="02030609000101010101" pitchFamily="17" charset="-127"/>
+                <a:ea typeface="바탕체" panose="02030609000101010101" pitchFamily="17" charset="-127"/>
+              </a:rPr>
+              <a:t>임계값</a:t>
+            </a:r>
+            <a:r>
+              <a:rPr lang="ko-KR" altLang="ko-KR" dirty="0">
+                <a:solidFill>
+                  <a:schemeClr val="tx1"/>
+                </a:solidFill>
+                <a:latin typeface="바탕체" panose="02030609000101010101" pitchFamily="17" charset="-127"/>
+                <a:ea typeface="바탕체" panose="02030609000101010101" pitchFamily="17" charset="-127"/>
+              </a:rPr>
+              <a:t> 검증 (</a:t>
+            </a:r>
+            <a:r>
+              <a:rPr lang="ko-KR" altLang="ko-KR" dirty="0" err="1">
+                <a:solidFill>
+                  <a:schemeClr val="tx1"/>
+                </a:solidFill>
+                <a:latin typeface="바탕체" panose="02030609000101010101" pitchFamily="17" charset="-127"/>
+                <a:ea typeface="바탕체" panose="02030609000101010101" pitchFamily="17" charset="-127"/>
+              </a:rPr>
+              <a:t>r</a:t>
+            </a:r>
+            <a:r>
+              <a:rPr lang="ko-KR" altLang="ko-KR" dirty="0">
+                <a:solidFill>
+                  <a:schemeClr val="tx1"/>
+                </a:solidFill>
+                <a:latin typeface="바탕체" panose="02030609000101010101" pitchFamily="17" charset="-127"/>
+                <a:ea typeface="바탕체" panose="02030609000101010101" pitchFamily="17" charset="-127"/>
+              </a:rPr>
+              <a:t>[</a:t>
+            </a:r>
+            <a:r>
+              <a:rPr lang="ko-KR" altLang="ko-KR" dirty="0" err="1">
+                <a:solidFill>
+                  <a:schemeClr val="tx1"/>
+                </a:solidFill>
+                <a:latin typeface="바탕체" panose="02030609000101010101" pitchFamily="17" charset="-127"/>
+                <a:ea typeface="바탕체" panose="02030609000101010101" pitchFamily="17" charset="-127"/>
+              </a:rPr>
+              <a:t>k_inv</a:t>
+            </a:r>
+            <a:r>
+              <a:rPr lang="ko-KR" altLang="ko-KR" dirty="0">
+                <a:solidFill>
+                  <a:schemeClr val="tx1"/>
+                </a:solidFill>
+                <a:latin typeface="바탕체" panose="02030609000101010101" pitchFamily="17" charset="-127"/>
+                <a:ea typeface="바탕체" panose="02030609000101010101" pitchFamily="17" charset="-127"/>
+              </a:rPr>
+              <a:t>] ≤ </a:t>
+            </a:r>
+            <a:r>
+              <a:rPr lang="ko-KR" altLang="ko-KR" dirty="0" err="1">
+                <a:solidFill>
+                  <a:schemeClr val="tx1"/>
+                </a:solidFill>
+                <a:latin typeface="바탕체" panose="02030609000101010101" pitchFamily="17" charset="-127"/>
+                <a:ea typeface="바탕체" panose="02030609000101010101" pitchFamily="17" charset="-127"/>
+              </a:rPr>
+              <a:t>r_th</a:t>
+            </a:r>
+            <a:r>
+              <a:rPr lang="ko-KR" altLang="ko-KR" dirty="0">
+                <a:solidFill>
+                  <a:schemeClr val="tx1"/>
+                </a:solidFill>
+                <a:latin typeface="바탕체" panose="02030609000101010101" pitchFamily="17" charset="-127"/>
+                <a:ea typeface="바탕체" panose="02030609000101010101" pitchFamily="17" charset="-127"/>
+              </a:rPr>
+              <a:t>) ───(불만족)───► [정상/</a:t>
+            </a:r>
+            <a:r>
+              <a:rPr lang="ko-KR" altLang="ko-KR" dirty="0" err="1">
+                <a:solidFill>
+                  <a:schemeClr val="tx1"/>
+                </a:solidFill>
+                <a:latin typeface="바탕체" panose="02030609000101010101" pitchFamily="17" charset="-127"/>
+                <a:ea typeface="바탕체" panose="02030609000101010101" pitchFamily="17" charset="-127"/>
+              </a:rPr>
+              <a:t>비결함</a:t>
+            </a:r>
+            <a:r>
+              <a:rPr lang="ko-KR" altLang="ko-KR" dirty="0">
+                <a:solidFill>
+                  <a:schemeClr val="tx1"/>
+                </a:solidFill>
+                <a:latin typeface="바탕체" panose="02030609000101010101" pitchFamily="17" charset="-127"/>
+                <a:ea typeface="바탕체" panose="02030609000101010101" pitchFamily="17" charset="-127"/>
+              </a:rPr>
+              <a:t> 처리]</a:t>
+            </a:r>
+            <a:endParaRPr lang="ko-KR" altLang="en-US" dirty="0">
+              <a:solidFill>
+                <a:schemeClr val="tx1"/>
+              </a:solidFill>
+              <a:latin typeface="바탕체" panose="02030609000101010101" pitchFamily="17" charset="-127"/>
+              <a:ea typeface="바탕체" panose="02030609000101010101" pitchFamily="17" charset="-127"/>
+            </a:endParaRPr>
+          </a:p>
+        </p:txBody>
+      </p:sp>
+      <p:sp>
+        <p:nvSpPr>
+          <p:cNvPr id="19" name="직사각형 18">
+            <a:extLst>
+              <a:ext uri="{FF2B5EF4-FFF2-40B4-BE49-F238E27FC236}">
+                <a16:creationId xmlns:a16="http://schemas.microsoft.com/office/drawing/2014/main" id="{829F3993-6B61-F3BF-86A8-73615CB149CF}"/>
+              </a:ext>
+            </a:extLst>
+          </p:cNvPr>
+          <p:cNvSpPr/>
+          <p:nvPr/>
+        </p:nvSpPr>
+        <p:spPr>
+          <a:xfrm>
+            <a:off x="457197" y="3908154"/>
+            <a:ext cx="11244022" cy="604435"/>
+          </a:xfrm>
+          <a:prstGeom prst="rect">
+            <a:avLst/>
+          </a:prstGeom>
+          <a:solidFill>
+            <a:schemeClr val="accent2">
+              <a:lumMod val="40000"/>
+              <a:lumOff val="60000"/>
+            </a:schemeClr>
+          </a:solidFill>
+          <a:ln>
+            <a:noFill/>
+          </a:ln>
+        </p:spPr>
+        <p:style>
+          <a:lnRef idx="2">
+            <a:schemeClr val="accent1">
+              <a:shade val="15000"/>
+            </a:schemeClr>
+          </a:lnRef>
+          <a:fillRef idx="1">
+            <a:schemeClr val="accent1"/>
+          </a:fillRef>
+          <a:effectRef idx="0">
+            <a:schemeClr val="accent1"/>
+          </a:effectRef>
+          <a:fontRef idx="minor">
+            <a:schemeClr val="lt1"/>
+          </a:fontRef>
+        </p:style>
+        <p:txBody>
+          <a:bodyPr rtlCol="0" anchor="ctr"/>
+          <a:lstStyle/>
+          <a:p>
+            <a:r>
+              <a:rPr lang="ko-KR" altLang="ko-KR" dirty="0">
+                <a:solidFill>
+                  <a:schemeClr val="tx1"/>
+                </a:solidFill>
+                <a:latin typeface="바탕체" panose="02030609000101010101" pitchFamily="17" charset="-127"/>
+                <a:ea typeface="바탕체" panose="02030609000101010101" pitchFamily="17" charset="-127"/>
+              </a:rPr>
+              <a:t>[2단계] 절대 진폭 </a:t>
+            </a:r>
+            <a:r>
+              <a:rPr lang="ko-KR" altLang="ko-KR" dirty="0" err="1">
+                <a:solidFill>
+                  <a:schemeClr val="tx1"/>
+                </a:solidFill>
+                <a:latin typeface="바탕체" panose="02030609000101010101" pitchFamily="17" charset="-127"/>
+                <a:ea typeface="바탕체" panose="02030609000101010101" pitchFamily="17" charset="-127"/>
+              </a:rPr>
+              <a:t>임계값</a:t>
+            </a:r>
+            <a:r>
+              <a:rPr lang="ko-KR" altLang="ko-KR" dirty="0">
+                <a:solidFill>
+                  <a:schemeClr val="tx1"/>
+                </a:solidFill>
+                <a:latin typeface="바탕체" panose="02030609000101010101" pitchFamily="17" charset="-127"/>
+                <a:ea typeface="바탕체" panose="02030609000101010101" pitchFamily="17" charset="-127"/>
+              </a:rPr>
+              <a:t> 검증 (|</a:t>
+            </a:r>
+            <a:r>
+              <a:rPr lang="ko-KR" altLang="ko-KR" dirty="0" err="1">
+                <a:solidFill>
+                  <a:schemeClr val="tx1"/>
+                </a:solidFill>
+                <a:latin typeface="바탕체" panose="02030609000101010101" pitchFamily="17" charset="-127"/>
+                <a:ea typeface="바탕체" panose="02030609000101010101" pitchFamily="17" charset="-127"/>
+              </a:rPr>
+              <a:t>s</a:t>
+            </a:r>
+            <a:r>
+              <a:rPr lang="ko-KR" altLang="ko-KR" dirty="0">
+                <a:solidFill>
+                  <a:schemeClr val="tx1"/>
+                </a:solidFill>
+                <a:latin typeface="바탕체" panose="02030609000101010101" pitchFamily="17" charset="-127"/>
+                <a:ea typeface="바탕체" panose="02030609000101010101" pitchFamily="17" charset="-127"/>
+              </a:rPr>
+              <a:t>[</a:t>
+            </a:r>
+            <a:r>
+              <a:rPr lang="ko-KR" altLang="ko-KR" dirty="0" err="1">
+                <a:solidFill>
+                  <a:schemeClr val="tx1"/>
+                </a:solidFill>
+                <a:latin typeface="바탕체" panose="02030609000101010101" pitchFamily="17" charset="-127"/>
+                <a:ea typeface="바탕체" panose="02030609000101010101" pitchFamily="17" charset="-127"/>
+              </a:rPr>
+              <a:t>k_inv</a:t>
+            </a:r>
+            <a:r>
+              <a:rPr lang="ko-KR" altLang="ko-KR" dirty="0">
+                <a:solidFill>
+                  <a:schemeClr val="tx1"/>
+                </a:solidFill>
+                <a:latin typeface="바탕체" panose="02030609000101010101" pitchFamily="17" charset="-127"/>
+                <a:ea typeface="바탕체" panose="02030609000101010101" pitchFamily="17" charset="-127"/>
+              </a:rPr>
+              <a:t>]| ≥ </a:t>
+            </a:r>
+            <a:r>
+              <a:rPr lang="ko-KR" altLang="ko-KR" dirty="0" err="1">
+                <a:solidFill>
+                  <a:schemeClr val="tx1"/>
+                </a:solidFill>
+                <a:latin typeface="바탕체" panose="02030609000101010101" pitchFamily="17" charset="-127"/>
+                <a:ea typeface="바탕체" panose="02030609000101010101" pitchFamily="17" charset="-127"/>
+              </a:rPr>
+              <a:t>A_th</a:t>
+            </a:r>
+            <a:r>
+              <a:rPr lang="ko-KR" altLang="ko-KR" dirty="0">
+                <a:solidFill>
+                  <a:schemeClr val="tx1"/>
+                </a:solidFill>
+                <a:latin typeface="바탕체" panose="02030609000101010101" pitchFamily="17" charset="-127"/>
+                <a:ea typeface="바탕체" panose="02030609000101010101" pitchFamily="17" charset="-127"/>
+              </a:rPr>
+              <a:t>) ──(불만족)───► [</a:t>
+            </a:r>
+            <a:r>
+              <a:rPr lang="ko-KR" altLang="ko-KR" dirty="0" err="1">
+                <a:solidFill>
+                  <a:schemeClr val="tx1"/>
+                </a:solidFill>
+                <a:latin typeface="바탕체" panose="02030609000101010101" pitchFamily="17" charset="-127"/>
+                <a:ea typeface="바탕체" panose="02030609000101010101" pitchFamily="17" charset="-127"/>
+              </a:rPr>
+              <a:t>과검</a:t>
+            </a:r>
+            <a:r>
+              <a:rPr lang="ko-KR" altLang="ko-KR" dirty="0">
+                <a:solidFill>
+                  <a:schemeClr val="tx1"/>
+                </a:solidFill>
+                <a:latin typeface="바탕체" panose="02030609000101010101" pitchFamily="17" charset="-127"/>
+                <a:ea typeface="바탕체" panose="02030609000101010101" pitchFamily="17" charset="-127"/>
+              </a:rPr>
+              <a:t> 차단 (</a:t>
+            </a:r>
+            <a:r>
+              <a:rPr lang="ko-KR" altLang="ko-KR" dirty="0" err="1">
+                <a:solidFill>
+                  <a:schemeClr val="tx1"/>
+                </a:solidFill>
+                <a:latin typeface="바탕체" panose="02030609000101010101" pitchFamily="17" charset="-127"/>
+                <a:ea typeface="바탕체" panose="02030609000101010101" pitchFamily="17" charset="-127"/>
+              </a:rPr>
+              <a:t>Noise</a:t>
+            </a:r>
+            <a:r>
+              <a:rPr lang="ko-KR" altLang="ko-KR" dirty="0">
+                <a:solidFill>
+                  <a:schemeClr val="tx1"/>
+                </a:solidFill>
+                <a:latin typeface="바탕체" panose="02030609000101010101" pitchFamily="17" charset="-127"/>
+                <a:ea typeface="바탕체" panose="02030609000101010101" pitchFamily="17" charset="-127"/>
+              </a:rPr>
+              <a:t>)]</a:t>
+            </a:r>
+            <a:endParaRPr lang="ko-KR" altLang="en-US" dirty="0">
+              <a:solidFill>
+                <a:schemeClr val="tx1"/>
+              </a:solidFill>
+              <a:latin typeface="바탕체" panose="02030609000101010101" pitchFamily="17" charset="-127"/>
+              <a:ea typeface="바탕체" panose="02030609000101010101" pitchFamily="17" charset="-127"/>
+            </a:endParaRPr>
+          </a:p>
+        </p:txBody>
+      </p:sp>
+      <p:sp>
+        <p:nvSpPr>
+          <p:cNvPr id="21" name="직사각형 20">
+            <a:extLst>
+              <a:ext uri="{FF2B5EF4-FFF2-40B4-BE49-F238E27FC236}">
+                <a16:creationId xmlns:a16="http://schemas.microsoft.com/office/drawing/2014/main" id="{04A43A3F-88BA-016D-6F1F-1564108183F7}"/>
+              </a:ext>
+            </a:extLst>
+          </p:cNvPr>
+          <p:cNvSpPr/>
+          <p:nvPr/>
+        </p:nvSpPr>
+        <p:spPr>
+          <a:xfrm>
+            <a:off x="457197" y="4897461"/>
+            <a:ext cx="11244022" cy="604436"/>
+          </a:xfrm>
+          <a:prstGeom prst="rect">
+            <a:avLst/>
+          </a:prstGeom>
+          <a:solidFill>
+            <a:schemeClr val="accent2">
+              <a:lumMod val="40000"/>
+              <a:lumOff val="60000"/>
+            </a:schemeClr>
+          </a:solidFill>
+          <a:ln>
+            <a:noFill/>
+          </a:ln>
+        </p:spPr>
+        <p:style>
+          <a:lnRef idx="2">
+            <a:schemeClr val="accent1">
+              <a:shade val="15000"/>
+            </a:schemeClr>
+          </a:lnRef>
+          <a:fillRef idx="1">
+            <a:schemeClr val="accent1"/>
+          </a:fillRef>
+          <a:effectRef idx="0">
+            <a:schemeClr val="accent1"/>
+          </a:effectRef>
+          <a:fontRef idx="minor">
+            <a:schemeClr val="lt1"/>
+          </a:fontRef>
+        </p:style>
+        <p:txBody>
+          <a:bodyPr rtlCol="0" anchor="ctr"/>
+          <a:lstStyle/>
+          <a:p>
+            <a:r>
+              <a:rPr lang="ko-KR" altLang="ko-KR" dirty="0">
+                <a:solidFill>
+                  <a:schemeClr val="tx1"/>
+                </a:solidFill>
+                <a:latin typeface="바탕체" panose="02030609000101010101" pitchFamily="17" charset="-127"/>
+                <a:ea typeface="바탕체" panose="02030609000101010101" pitchFamily="17" charset="-127"/>
+              </a:rPr>
+              <a:t>[3단계] 공간 ROI 경계 검증 (</a:t>
+            </a:r>
+            <a:r>
+              <a:rPr lang="ko-KR" altLang="ko-KR" dirty="0" err="1">
+                <a:solidFill>
+                  <a:schemeClr val="tx1"/>
+                </a:solidFill>
+                <a:latin typeface="바탕체" panose="02030609000101010101" pitchFamily="17" charset="-127"/>
+                <a:ea typeface="바탕체" panose="02030609000101010101" pitchFamily="17" charset="-127"/>
+              </a:rPr>
+              <a:t>n_start</a:t>
+            </a:r>
+            <a:r>
+              <a:rPr lang="ko-KR" altLang="ko-KR" dirty="0">
+                <a:solidFill>
+                  <a:schemeClr val="tx1"/>
+                </a:solidFill>
+                <a:latin typeface="바탕체" panose="02030609000101010101" pitchFamily="17" charset="-127"/>
+                <a:ea typeface="바탕체" panose="02030609000101010101" pitchFamily="17" charset="-127"/>
+              </a:rPr>
+              <a:t> ≤ </a:t>
+            </a:r>
+            <a:r>
+              <a:rPr lang="ko-KR" altLang="ko-KR" dirty="0" err="1">
+                <a:solidFill>
+                  <a:schemeClr val="tx1"/>
+                </a:solidFill>
+                <a:latin typeface="바탕체" panose="02030609000101010101" pitchFamily="17" charset="-127"/>
+                <a:ea typeface="바탕체" panose="02030609000101010101" pitchFamily="17" charset="-127"/>
+              </a:rPr>
+              <a:t>k_inv</a:t>
+            </a:r>
+            <a:r>
+              <a:rPr lang="ko-KR" altLang="ko-KR" dirty="0">
+                <a:solidFill>
+                  <a:schemeClr val="tx1"/>
+                </a:solidFill>
+                <a:latin typeface="바탕체" panose="02030609000101010101" pitchFamily="17" charset="-127"/>
+                <a:ea typeface="바탕체" panose="02030609000101010101" pitchFamily="17" charset="-127"/>
+              </a:rPr>
+              <a:t> ≤ </a:t>
+            </a:r>
+            <a:r>
+              <a:rPr lang="ko-KR" altLang="ko-KR" dirty="0" err="1">
+                <a:solidFill>
+                  <a:schemeClr val="tx1"/>
+                </a:solidFill>
+                <a:latin typeface="바탕체" panose="02030609000101010101" pitchFamily="17" charset="-127"/>
+                <a:ea typeface="바탕체" panose="02030609000101010101" pitchFamily="17" charset="-127"/>
+              </a:rPr>
+              <a:t>n_end</a:t>
+            </a:r>
+            <a:r>
+              <a:rPr lang="ko-KR" altLang="ko-KR" dirty="0">
+                <a:solidFill>
+                  <a:schemeClr val="tx1"/>
+                </a:solidFill>
+                <a:latin typeface="바탕체" panose="02030609000101010101" pitchFamily="17" charset="-127"/>
+                <a:ea typeface="바탕체" panose="02030609000101010101" pitchFamily="17" charset="-127"/>
+              </a:rPr>
+              <a:t>) ─(불만족)──► [</a:t>
+            </a:r>
+            <a:r>
+              <a:rPr lang="ko-KR" altLang="ko-KR" dirty="0" err="1">
+                <a:solidFill>
+                  <a:schemeClr val="tx1"/>
+                </a:solidFill>
+                <a:latin typeface="바탕체" panose="02030609000101010101" pitchFamily="17" charset="-127"/>
+                <a:ea typeface="바탕체" panose="02030609000101010101" pitchFamily="17" charset="-127"/>
+              </a:rPr>
+              <a:t>과검</a:t>
+            </a:r>
+            <a:r>
+              <a:rPr lang="ko-KR" altLang="ko-KR" dirty="0">
+                <a:solidFill>
+                  <a:schemeClr val="tx1"/>
+                </a:solidFill>
+                <a:latin typeface="바탕체" panose="02030609000101010101" pitchFamily="17" charset="-127"/>
+                <a:ea typeface="바탕체" panose="02030609000101010101" pitchFamily="17" charset="-127"/>
+              </a:rPr>
+              <a:t> 차단 (</a:t>
+            </a:r>
+            <a:r>
+              <a:rPr lang="ko-KR" altLang="ko-KR" dirty="0" err="1">
+                <a:solidFill>
+                  <a:schemeClr val="tx1"/>
+                </a:solidFill>
+                <a:latin typeface="바탕체" panose="02030609000101010101" pitchFamily="17" charset="-127"/>
+                <a:ea typeface="바탕체" panose="02030609000101010101" pitchFamily="17" charset="-127"/>
+              </a:rPr>
+              <a:t>Boundary</a:t>
+            </a:r>
+            <a:r>
+              <a:rPr lang="ko-KR" altLang="ko-KR" dirty="0">
+                <a:solidFill>
+                  <a:schemeClr val="tx1"/>
+                </a:solidFill>
+                <a:latin typeface="바탕체" panose="02030609000101010101" pitchFamily="17" charset="-127"/>
+                <a:ea typeface="바탕체" panose="02030609000101010101" pitchFamily="17" charset="-127"/>
+              </a:rPr>
+              <a:t>)]</a:t>
+            </a:r>
+            <a:endParaRPr lang="ko-KR" altLang="en-US" dirty="0">
+              <a:solidFill>
+                <a:schemeClr val="tx1"/>
+              </a:solidFill>
+              <a:latin typeface="바탕체" panose="02030609000101010101" pitchFamily="17" charset="-127"/>
+              <a:ea typeface="바탕체" panose="02030609000101010101" pitchFamily="17" charset="-127"/>
+            </a:endParaRPr>
+          </a:p>
+        </p:txBody>
+      </p:sp>
+      <p:sp>
+        <p:nvSpPr>
+          <p:cNvPr id="23" name="직사각형 22">
+            <a:extLst>
+              <a:ext uri="{FF2B5EF4-FFF2-40B4-BE49-F238E27FC236}">
+                <a16:creationId xmlns:a16="http://schemas.microsoft.com/office/drawing/2014/main" id="{67B11A30-10CF-80B1-454E-6E77F513D950}"/>
+              </a:ext>
+            </a:extLst>
+          </p:cNvPr>
+          <p:cNvSpPr/>
+          <p:nvPr/>
+        </p:nvSpPr>
+        <p:spPr>
+          <a:xfrm>
+            <a:off x="457196" y="5855772"/>
+            <a:ext cx="6261315" cy="604435"/>
+          </a:xfrm>
+          <a:prstGeom prst="rect">
+            <a:avLst/>
+          </a:prstGeom>
+          <a:solidFill>
+            <a:schemeClr val="accent2">
+              <a:lumMod val="40000"/>
+              <a:lumOff val="60000"/>
+            </a:schemeClr>
+          </a:solidFill>
+          <a:ln>
+            <a:noFill/>
+          </a:ln>
+        </p:spPr>
+        <p:style>
+          <a:lnRef idx="2">
+            <a:schemeClr val="accent1">
+              <a:shade val="15000"/>
+            </a:schemeClr>
+          </a:lnRef>
+          <a:fillRef idx="1">
+            <a:schemeClr val="accent1"/>
+          </a:fillRef>
+          <a:effectRef idx="0">
+            <a:schemeClr val="accent1"/>
+          </a:effectRef>
+          <a:fontRef idx="minor">
+            <a:schemeClr val="lt1"/>
+          </a:fontRef>
+        </p:style>
+        <p:txBody>
+          <a:bodyPr rtlCol="0" anchor="ctr"/>
+          <a:lstStyle/>
+          <a:p>
+            <a:r>
+              <a:rPr lang="ko-KR" altLang="ko-KR" dirty="0">
+                <a:solidFill>
+                  <a:schemeClr val="tx1"/>
+                </a:solidFill>
+                <a:latin typeface="바탕체" panose="02030609000101010101" pitchFamily="17" charset="-127"/>
+                <a:ea typeface="바탕체" panose="02030609000101010101" pitchFamily="17" charset="-127"/>
+              </a:rPr>
+              <a:t>[최종 결함 판정 (</a:t>
+            </a:r>
+            <a:r>
+              <a:rPr lang="ko-KR" altLang="ko-KR" dirty="0" err="1">
+                <a:solidFill>
+                  <a:schemeClr val="tx1"/>
+                </a:solidFill>
+                <a:latin typeface="바탕체" panose="02030609000101010101" pitchFamily="17" charset="-127"/>
+                <a:ea typeface="바탕체" panose="02030609000101010101" pitchFamily="17" charset="-127"/>
+              </a:rPr>
+              <a:t>k_inv</a:t>
+            </a:r>
+            <a:r>
+              <a:rPr lang="ko-KR" altLang="ko-KR" dirty="0">
+                <a:solidFill>
+                  <a:schemeClr val="tx1"/>
+                </a:solidFill>
+                <a:latin typeface="바탕체" panose="02030609000101010101" pitchFamily="17" charset="-127"/>
+                <a:ea typeface="바탕체" panose="02030609000101010101" pitchFamily="17" charset="-127"/>
+              </a:rPr>
+              <a:t> 확정 및 </a:t>
+            </a:r>
+            <a:r>
+              <a:rPr lang="ko-KR" altLang="ko-KR" dirty="0" err="1">
+                <a:solidFill>
+                  <a:schemeClr val="tx1"/>
+                </a:solidFill>
+                <a:latin typeface="바탕체" panose="02030609000101010101" pitchFamily="17" charset="-127"/>
+                <a:ea typeface="바탕체" panose="02030609000101010101" pitchFamily="17" charset="-127"/>
+              </a:rPr>
+              <a:t>Overlay</a:t>
+            </a:r>
+            <a:r>
+              <a:rPr lang="ko-KR" altLang="ko-KR" dirty="0">
+                <a:solidFill>
+                  <a:schemeClr val="tx1"/>
+                </a:solidFill>
+                <a:latin typeface="바탕체" panose="02030609000101010101" pitchFamily="17" charset="-127"/>
+                <a:ea typeface="바탕체" panose="02030609000101010101" pitchFamily="17" charset="-127"/>
+              </a:rPr>
+              <a:t> 표시)]</a:t>
+            </a:r>
+            <a:endParaRPr lang="ko-KR" altLang="en-US" dirty="0">
+              <a:solidFill>
+                <a:schemeClr val="tx1"/>
+              </a:solidFill>
+              <a:latin typeface="바탕체" panose="02030609000101010101" pitchFamily="17" charset="-127"/>
+              <a:ea typeface="바탕체" panose="02030609000101010101" pitchFamily="17" charset="-127"/>
+            </a:endParaRPr>
+          </a:p>
+        </p:txBody>
+      </p:sp>
+      <p:cxnSp>
+        <p:nvCxnSpPr>
+          <p:cNvPr id="25" name="직선 화살표 연결선 24">
+            <a:extLst>
+              <a:ext uri="{FF2B5EF4-FFF2-40B4-BE49-F238E27FC236}">
+                <a16:creationId xmlns:a16="http://schemas.microsoft.com/office/drawing/2014/main" id="{CF030184-E2DF-0C43-1B4B-8386E9F0B139}"/>
+              </a:ext>
+            </a:extLst>
+          </p:cNvPr>
+          <p:cNvCxnSpPr/>
+          <p:nvPr/>
+        </p:nvCxnSpPr>
+        <p:spPr>
+          <a:xfrm>
+            <a:off x="1906292" y="2557219"/>
+            <a:ext cx="0" cy="359044"/>
+          </a:xfrm>
+          <a:prstGeom prst="straightConnector1">
+            <a:avLst/>
+          </a:prstGeom>
+          <a:ln>
+            <a:tailEnd type="triangle"/>
+          </a:ln>
+        </p:spPr>
+        <p:style>
+          <a:lnRef idx="2">
+            <a:schemeClr val="accent1"/>
+          </a:lnRef>
+          <a:fillRef idx="0">
+            <a:schemeClr val="accent1"/>
+          </a:fillRef>
+          <a:effectRef idx="1">
+            <a:schemeClr val="accent1"/>
+          </a:effectRef>
+          <a:fontRef idx="minor">
+            <a:schemeClr val="tx1"/>
+          </a:fontRef>
+        </p:style>
+      </p:cxnSp>
+      <p:cxnSp>
+        <p:nvCxnSpPr>
+          <p:cNvPr id="26" name="직선 화살표 연결선 25">
+            <a:extLst>
+              <a:ext uri="{FF2B5EF4-FFF2-40B4-BE49-F238E27FC236}">
+                <a16:creationId xmlns:a16="http://schemas.microsoft.com/office/drawing/2014/main" id="{0E3BA0D9-4D3D-9C89-F978-988CE43AB022}"/>
+              </a:ext>
+            </a:extLst>
+          </p:cNvPr>
+          <p:cNvCxnSpPr/>
+          <p:nvPr/>
+        </p:nvCxnSpPr>
+        <p:spPr>
+          <a:xfrm>
+            <a:off x="1906292" y="3520698"/>
+            <a:ext cx="0" cy="359044"/>
+          </a:xfrm>
+          <a:prstGeom prst="straightConnector1">
+            <a:avLst/>
+          </a:prstGeom>
+          <a:ln>
+            <a:tailEnd type="triangle"/>
+          </a:ln>
+        </p:spPr>
+        <p:style>
+          <a:lnRef idx="2">
+            <a:schemeClr val="accent1"/>
+          </a:lnRef>
+          <a:fillRef idx="0">
+            <a:schemeClr val="accent1"/>
+          </a:fillRef>
+          <a:effectRef idx="1">
+            <a:schemeClr val="accent1"/>
+          </a:effectRef>
+          <a:fontRef idx="minor">
+            <a:schemeClr val="tx1"/>
+          </a:fontRef>
+        </p:style>
+      </p:cxnSp>
+      <p:cxnSp>
+        <p:nvCxnSpPr>
+          <p:cNvPr id="27" name="직선 화살표 연결선 26">
+            <a:extLst>
+              <a:ext uri="{FF2B5EF4-FFF2-40B4-BE49-F238E27FC236}">
+                <a16:creationId xmlns:a16="http://schemas.microsoft.com/office/drawing/2014/main" id="{2345C715-F26B-3E88-62F4-B1B19FB6BB26}"/>
+              </a:ext>
+            </a:extLst>
+          </p:cNvPr>
+          <p:cNvCxnSpPr/>
+          <p:nvPr/>
+        </p:nvCxnSpPr>
+        <p:spPr>
+          <a:xfrm>
+            <a:off x="1934706" y="4553915"/>
+            <a:ext cx="0" cy="359044"/>
+          </a:xfrm>
+          <a:prstGeom prst="straightConnector1">
+            <a:avLst/>
+          </a:prstGeom>
+          <a:ln>
+            <a:tailEnd type="triangle"/>
+          </a:ln>
+        </p:spPr>
+        <p:style>
+          <a:lnRef idx="2">
+            <a:schemeClr val="accent1"/>
+          </a:lnRef>
+          <a:fillRef idx="0">
+            <a:schemeClr val="accent1"/>
+          </a:fillRef>
+          <a:effectRef idx="1">
+            <a:schemeClr val="accent1"/>
+          </a:effectRef>
+          <a:fontRef idx="minor">
+            <a:schemeClr val="tx1"/>
+          </a:fontRef>
+        </p:style>
+      </p:cxnSp>
+      <p:cxnSp>
+        <p:nvCxnSpPr>
+          <p:cNvPr id="28" name="직선 화살표 연결선 27">
+            <a:extLst>
+              <a:ext uri="{FF2B5EF4-FFF2-40B4-BE49-F238E27FC236}">
+                <a16:creationId xmlns:a16="http://schemas.microsoft.com/office/drawing/2014/main" id="{0AE2A058-01C4-C026-21CA-1477E7DFD0B8}"/>
+              </a:ext>
+            </a:extLst>
+          </p:cNvPr>
+          <p:cNvCxnSpPr/>
+          <p:nvPr/>
+        </p:nvCxnSpPr>
+        <p:spPr>
+          <a:xfrm>
+            <a:off x="1906292" y="5496725"/>
+            <a:ext cx="0" cy="359044"/>
+          </a:xfrm>
+          <a:prstGeom prst="straightConnector1">
+            <a:avLst/>
+          </a:prstGeom>
+          <a:ln>
+            <a:tailEnd type="triangle"/>
+          </a:ln>
+        </p:spPr>
+        <p:style>
+          <a:lnRef idx="2">
+            <a:schemeClr val="accent1"/>
+          </a:lnRef>
+          <a:fillRef idx="0">
+            <a:schemeClr val="accent1"/>
+          </a:fillRef>
+          <a:effectRef idx="1">
+            <a:schemeClr val="accent1"/>
+          </a:effectRef>
+          <a:fontRef idx="minor">
+            <a:schemeClr val="tx1"/>
+          </a:fontRef>
+        </p:style>
+      </p:cxnSp>
+      <p:sp>
+        <p:nvSpPr>
+          <p:cNvPr id="29" name="TextBox 28">
+            <a:extLst>
+              <a:ext uri="{FF2B5EF4-FFF2-40B4-BE49-F238E27FC236}">
+                <a16:creationId xmlns:a16="http://schemas.microsoft.com/office/drawing/2014/main" id="{DF5DF7A9-59D7-3E4A-AC21-EE790EEB628A}"/>
+              </a:ext>
+            </a:extLst>
+          </p:cNvPr>
+          <p:cNvSpPr txBox="1"/>
+          <p:nvPr/>
+        </p:nvSpPr>
+        <p:spPr>
+          <a:xfrm>
+            <a:off x="1934706" y="2526223"/>
+            <a:ext cx="1071965" cy="369332"/>
+          </a:xfrm>
+          <a:prstGeom prst="rect">
+            <a:avLst/>
+          </a:prstGeom>
+          <a:noFill/>
+        </p:spPr>
+        <p:txBody>
+          <a:bodyPr wrap="square" rtlCol="0">
+            <a:spAutoFit/>
+          </a:bodyPr>
+          <a:lstStyle/>
+          <a:p>
+            <a:r>
+              <a:rPr lang="ko-KR" altLang="en-US">
+                <a:latin typeface="바탕체" panose="02030609000101010101" pitchFamily="17" charset="-127"/>
+                <a:ea typeface="바탕체" panose="02030609000101010101" pitchFamily="17" charset="-127"/>
+              </a:rPr>
+              <a:t>만족</a:t>
+            </a:r>
+          </a:p>
+        </p:txBody>
+      </p:sp>
+      <p:sp>
+        <p:nvSpPr>
+          <p:cNvPr id="31" name="TextBox 30">
+            <a:extLst>
+              <a:ext uri="{FF2B5EF4-FFF2-40B4-BE49-F238E27FC236}">
+                <a16:creationId xmlns:a16="http://schemas.microsoft.com/office/drawing/2014/main" id="{BFA2186A-061B-5241-5673-54D19B727841}"/>
+              </a:ext>
+            </a:extLst>
+          </p:cNvPr>
+          <p:cNvSpPr txBox="1"/>
+          <p:nvPr/>
+        </p:nvSpPr>
+        <p:spPr>
+          <a:xfrm>
+            <a:off x="1934706" y="3499990"/>
+            <a:ext cx="1071965" cy="369332"/>
+          </a:xfrm>
+          <a:prstGeom prst="rect">
+            <a:avLst/>
+          </a:prstGeom>
+          <a:noFill/>
+        </p:spPr>
+        <p:txBody>
+          <a:bodyPr wrap="square" rtlCol="0">
+            <a:spAutoFit/>
+          </a:bodyPr>
+          <a:lstStyle/>
+          <a:p>
+            <a:r>
+              <a:rPr lang="ko-KR" altLang="en-US" dirty="0">
+                <a:latin typeface="바탕체" panose="02030609000101010101" pitchFamily="17" charset="-127"/>
+                <a:ea typeface="바탕체" panose="02030609000101010101" pitchFamily="17" charset="-127"/>
+              </a:rPr>
+              <a:t>만족</a:t>
+            </a:r>
+          </a:p>
+        </p:txBody>
+      </p:sp>
+      <p:sp>
+        <p:nvSpPr>
+          <p:cNvPr id="33" name="TextBox 32">
+            <a:extLst>
+              <a:ext uri="{FF2B5EF4-FFF2-40B4-BE49-F238E27FC236}">
+                <a16:creationId xmlns:a16="http://schemas.microsoft.com/office/drawing/2014/main" id="{C260E021-CCD3-129D-8906-92DE6A3608FD}"/>
+              </a:ext>
+            </a:extLst>
+          </p:cNvPr>
+          <p:cNvSpPr txBox="1"/>
+          <p:nvPr/>
+        </p:nvSpPr>
+        <p:spPr>
+          <a:xfrm>
+            <a:off x="1934706" y="4503569"/>
+            <a:ext cx="1071965" cy="369332"/>
+          </a:xfrm>
+          <a:prstGeom prst="rect">
+            <a:avLst/>
+          </a:prstGeom>
+          <a:noFill/>
+        </p:spPr>
+        <p:txBody>
+          <a:bodyPr wrap="square" rtlCol="0">
+            <a:spAutoFit/>
+          </a:bodyPr>
+          <a:lstStyle/>
+          <a:p>
+            <a:r>
+              <a:rPr lang="ko-KR" altLang="en-US" dirty="0">
+                <a:latin typeface="바탕체" panose="02030609000101010101" pitchFamily="17" charset="-127"/>
+                <a:ea typeface="바탕체" panose="02030609000101010101" pitchFamily="17" charset="-127"/>
+              </a:rPr>
+              <a:t>만족</a:t>
+            </a:r>
+          </a:p>
+        </p:txBody>
+      </p:sp>
+      <p:sp>
+        <p:nvSpPr>
+          <p:cNvPr id="35" name="TextBox 34">
+            <a:extLst>
+              <a:ext uri="{FF2B5EF4-FFF2-40B4-BE49-F238E27FC236}">
+                <a16:creationId xmlns:a16="http://schemas.microsoft.com/office/drawing/2014/main" id="{5C1F5196-7A53-4CFE-A3CD-904FA82833E9}"/>
+              </a:ext>
+            </a:extLst>
+          </p:cNvPr>
+          <p:cNvSpPr txBox="1"/>
+          <p:nvPr/>
+        </p:nvSpPr>
+        <p:spPr>
+          <a:xfrm>
+            <a:off x="1934706" y="5468316"/>
+            <a:ext cx="1071965" cy="369332"/>
+          </a:xfrm>
+          <a:prstGeom prst="rect">
+            <a:avLst/>
+          </a:prstGeom>
+          <a:noFill/>
+        </p:spPr>
+        <p:txBody>
+          <a:bodyPr wrap="square" rtlCol="0">
+            <a:spAutoFit/>
+          </a:bodyPr>
+          <a:lstStyle/>
+          <a:p>
+            <a:r>
+              <a:rPr lang="ko-KR" altLang="en-US" dirty="0">
+                <a:latin typeface="바탕체" panose="02030609000101010101" pitchFamily="17" charset="-127"/>
+                <a:ea typeface="바탕체" panose="02030609000101010101" pitchFamily="17" charset="-127"/>
+              </a:rPr>
+              <a:t>만족</a:t>
+            </a:r>
+          </a:p>
+        </p:txBody>
+      </p:sp>
+    </p:spTree>
+    <p:extLst>
+      <p:ext uri="{BB962C8B-B14F-4D97-AF65-F5344CB8AC3E}">
+        <p14:creationId xmlns:p14="http://schemas.microsoft.com/office/powerpoint/2010/main" val="902168294"/>
       </p:ext>
     </p:extLst>
   </p:cSld>

--- a/Material csv(26.07.28)/논문 자료.pptx
+++ b/Material csv(26.07.28)/논문 자료.pptx
@@ -18933,7 +18933,7 @@
         </p:nvSpPr>
         <p:spPr>
           <a:xfrm>
-            <a:off x="11522529" y="2144486"/>
+            <a:off x="11549743" y="2338365"/>
             <a:ext cx="718456" cy="369332"/>
           </a:xfrm>
           <a:prstGeom prst="rect">
@@ -19058,6 +19058,240 @@
             <a:r>
               <a:rPr lang="en-US" altLang="ko-KR" dirty="0"/>
               <a:t>310</a:t>
+            </a:r>
+            <a:endParaRPr lang="ko-KR" altLang="en-US" dirty="0"/>
+          </a:p>
+        </p:txBody>
+      </p:sp>
+      <p:sp>
+        <p:nvSpPr>
+          <p:cNvPr id="2" name="직사각형 1">
+            <a:extLst>
+              <a:ext uri="{FF2B5EF4-FFF2-40B4-BE49-F238E27FC236}">
+                <a16:creationId xmlns:a16="http://schemas.microsoft.com/office/drawing/2014/main" id="{7B314183-FB59-D956-FB85-7DC8C5AFF54B}"/>
+              </a:ext>
+            </a:extLst>
+          </p:cNvPr>
+          <p:cNvSpPr/>
+          <p:nvPr/>
+        </p:nvSpPr>
+        <p:spPr>
+          <a:xfrm>
+            <a:off x="5116285" y="2144486"/>
+            <a:ext cx="6466115" cy="369332"/>
+          </a:xfrm>
+          <a:prstGeom prst="rect">
+            <a:avLst/>
+          </a:prstGeom>
+          <a:solidFill>
+            <a:schemeClr val="bg1"/>
+          </a:solidFill>
+          <a:ln>
+            <a:solidFill>
+              <a:schemeClr val="bg1"/>
+            </a:solidFill>
+          </a:ln>
+        </p:spPr>
+        <p:style>
+          <a:lnRef idx="2">
+            <a:schemeClr val="accent1">
+              <a:shade val="15000"/>
+            </a:schemeClr>
+          </a:lnRef>
+          <a:fillRef idx="1">
+            <a:schemeClr val="accent1"/>
+          </a:fillRef>
+          <a:effectRef idx="0">
+            <a:schemeClr val="accent1"/>
+          </a:effectRef>
+          <a:fontRef idx="minor">
+            <a:schemeClr val="lt1"/>
+          </a:fontRef>
+        </p:style>
+        <p:txBody>
+          <a:bodyPr rtlCol="0" anchor="ctr"/>
+          <a:lstStyle/>
+          <a:p>
+            <a:pPr algn="ctr"/>
+            <a:endParaRPr lang="ko-KR" altLang="en-US"/>
+          </a:p>
+        </p:txBody>
+      </p:sp>
+      <p:cxnSp>
+        <p:nvCxnSpPr>
+          <p:cNvPr id="4" name="직선 연결선 3">
+            <a:extLst>
+              <a:ext uri="{FF2B5EF4-FFF2-40B4-BE49-F238E27FC236}">
+                <a16:creationId xmlns:a16="http://schemas.microsoft.com/office/drawing/2014/main" id="{EA514F8B-F4C6-5F1B-1280-DB50060CE48F}"/>
+              </a:ext>
+            </a:extLst>
+          </p:cNvPr>
+          <p:cNvCxnSpPr/>
+          <p:nvPr/>
+        </p:nvCxnSpPr>
+        <p:spPr>
+          <a:xfrm>
+            <a:off x="6311153" y="2513818"/>
+            <a:ext cx="0" cy="2657288"/>
+          </a:xfrm>
+          <a:prstGeom prst="line">
+            <a:avLst/>
+          </a:prstGeom>
+        </p:spPr>
+        <p:style>
+          <a:lnRef idx="2">
+            <a:schemeClr val="accent6"/>
+          </a:lnRef>
+          <a:fillRef idx="0">
+            <a:schemeClr val="accent6"/>
+          </a:fillRef>
+          <a:effectRef idx="1">
+            <a:schemeClr val="accent6"/>
+          </a:effectRef>
+          <a:fontRef idx="minor">
+            <a:schemeClr val="tx1"/>
+          </a:fontRef>
+        </p:style>
+      </p:cxnSp>
+      <p:sp>
+        <p:nvSpPr>
+          <p:cNvPr id="6" name="TextBox 5">
+            <a:extLst>
+              <a:ext uri="{FF2B5EF4-FFF2-40B4-BE49-F238E27FC236}">
+                <a16:creationId xmlns:a16="http://schemas.microsoft.com/office/drawing/2014/main" id="{859304CA-04D0-3A21-E3B3-DAABFACB2A05}"/>
+              </a:ext>
+            </a:extLst>
+          </p:cNvPr>
+          <p:cNvSpPr txBox="1"/>
+          <p:nvPr/>
+        </p:nvSpPr>
+        <p:spPr>
+          <a:xfrm>
+            <a:off x="6015317" y="5447237"/>
+            <a:ext cx="4724401" cy="923330"/>
+          </a:xfrm>
+          <a:prstGeom prst="rect">
+            <a:avLst/>
+          </a:prstGeom>
+        </p:spPr>
+        <p:style>
+          <a:lnRef idx="2">
+            <a:schemeClr val="accent6"/>
+          </a:lnRef>
+          <a:fillRef idx="1">
+            <a:schemeClr val="lt1"/>
+          </a:fillRef>
+          <a:effectRef idx="0">
+            <a:schemeClr val="accent6"/>
+          </a:effectRef>
+          <a:fontRef idx="minor">
+            <a:schemeClr val="dk1"/>
+          </a:fontRef>
+        </p:style>
+        <p:txBody>
+          <a:bodyPr wrap="square" rtlCol="0">
+            <a:spAutoFit/>
+          </a:bodyPr>
+          <a:lstStyle/>
+          <a:p>
+            <a:r>
+              <a:rPr lang="en-US" altLang="ko-KR" dirty="0"/>
+              <a:t>CTRL </a:t>
+            </a:r>
+            <a:r>
+              <a:rPr lang="ko-KR" altLang="en-US" dirty="0"/>
+              <a:t>누르고</a:t>
+            </a:r>
+            <a:r>
+              <a:rPr lang="en-US" altLang="ko-KR" dirty="0"/>
+              <a:t>, </a:t>
+            </a:r>
+            <a:r>
+              <a:rPr lang="ko-KR" altLang="en-US" dirty="0"/>
+              <a:t>마우스로 </a:t>
+            </a:r>
+            <a:r>
+              <a:rPr lang="en-US" altLang="ko-KR" dirty="0"/>
+              <a:t>B</a:t>
+            </a:r>
+            <a:r>
+              <a:rPr lang="ko-KR" altLang="en-US" dirty="0"/>
+              <a:t>스캔 이미지의 위치 가리키면</a:t>
+            </a:r>
+            <a:r>
+              <a:rPr lang="en-US" altLang="ko-KR" dirty="0"/>
+              <a:t>, X</a:t>
+            </a:r>
+            <a:r>
+              <a:rPr lang="ko-KR" altLang="en-US" dirty="0"/>
+              <a:t>축 따라가며</a:t>
+            </a:r>
+            <a:r>
+              <a:rPr lang="en-US" altLang="ko-KR" dirty="0"/>
+              <a:t>, </a:t>
+            </a:r>
+            <a:r>
+              <a:rPr lang="ko-KR" altLang="en-US" dirty="0"/>
+              <a:t>왼쪽 </a:t>
+            </a:r>
+            <a:r>
+              <a:rPr lang="en-US" altLang="ko-KR" dirty="0"/>
+              <a:t>3</a:t>
+            </a:r>
+            <a:r>
+              <a:rPr lang="ko-KR" altLang="en-US" dirty="0"/>
+              <a:t>개의 </a:t>
+            </a:r>
+            <a:r>
+              <a:rPr lang="en-US" altLang="ko-KR" dirty="0"/>
+              <a:t>A</a:t>
+            </a:r>
+            <a:r>
+              <a:rPr lang="ko-KR" altLang="en-US" dirty="0"/>
+              <a:t>파형들이 자동으로 바뀜</a:t>
+            </a:r>
+          </a:p>
+        </p:txBody>
+      </p:sp>
+      <p:sp>
+        <p:nvSpPr>
+          <p:cNvPr id="10" name="TextBox 9">
+            <a:extLst>
+              <a:ext uri="{FF2B5EF4-FFF2-40B4-BE49-F238E27FC236}">
+                <a16:creationId xmlns:a16="http://schemas.microsoft.com/office/drawing/2014/main" id="{786A350E-8ACD-3A4D-5774-DA6D8FBEFD9B}"/>
+              </a:ext>
+            </a:extLst>
+          </p:cNvPr>
+          <p:cNvSpPr txBox="1"/>
+          <p:nvPr/>
+        </p:nvSpPr>
+        <p:spPr>
+          <a:xfrm>
+            <a:off x="7652017" y="2031589"/>
+            <a:ext cx="2061883" cy="369332"/>
+          </a:xfrm>
+          <a:prstGeom prst="rect">
+            <a:avLst/>
+          </a:prstGeom>
+          <a:noFill/>
+        </p:spPr>
+        <p:txBody>
+          <a:bodyPr wrap="square" rtlCol="0">
+            <a:spAutoFit/>
+          </a:bodyPr>
+          <a:lstStyle/>
+          <a:p>
+            <a:r>
+              <a:rPr lang="en-US" altLang="ko-KR" dirty="0"/>
+              <a:t>B</a:t>
+            </a:r>
+            <a:r>
+              <a:rPr lang="ko-KR" altLang="en-US" dirty="0"/>
+              <a:t> </a:t>
+            </a:r>
+            <a:r>
+              <a:rPr lang="en-US" altLang="ko-KR" dirty="0"/>
+              <a:t>SCAN</a:t>
             </a:r>
             <a:endParaRPr lang="ko-KR" altLang="en-US" dirty="0"/>
           </a:p>
